--- a/Проект_ОП03_Федоткина.pptx
+++ b/Проект_ОП03_Федоткина.pptx
@@ -111,6 +111,11 @@
       </a:defRPr>
     </a:lvl9pPr>
   </p:defaultTextStyle>
+  <p:extLst>
+    <p:ext uri="{EFAFB233-063F-42B5-8137-9DF3F51BA10A}">
+      <p15:sldGuideLst xmlns:p15="http://schemas.microsoft.com/office/powerpoint/2012/main"/>
+    </p:ext>
+  </p:extLst>
 </p:presentation>
 </file>
 
@@ -245,7 +250,7 @@
           <a:p>
             <a:fld id="{43FF4CB4-861E-4CB2-8936-28FA22AF4D0D}" type="datetimeFigureOut">
               <a:rPr lang="ru-RU" smtClean="0"/>
-              <a:t>02.04.2026</a:t>
+              <a:t>15.04.2026</a:t>
             </a:fld>
             <a:endParaRPr lang="ru-RU"/>
           </a:p>
@@ -303,13 +308,13 @@
   <p:clrMapOvr>
     <a:masterClrMapping/>
   </p:clrMapOvr>
-  <mc:AlternateContent xmlns:mc="http://schemas.openxmlformats.org/markup-compatibility/2006">
-    <mc:Choice xmlns:p14="http://schemas.microsoft.com/office/powerpoint/2010/main" Requires="p14">
+  <mc:AlternateContent xmlns:mc="http://schemas.openxmlformats.org/markup-compatibility/2006" xmlns:p14="http://schemas.microsoft.com/office/powerpoint/2010/main">
+    <mc:Choice Requires="p14">
       <p:transition spd="med" p14:dur="700">
         <p:fade/>
       </p:transition>
     </mc:Choice>
-    <mc:Fallback>
+    <mc:Fallback xmlns="">
       <p:transition spd="med">
         <p:fade/>
       </p:transition>
@@ -427,7 +432,7 @@
           <a:p>
             <a:fld id="{43FF4CB4-861E-4CB2-8936-28FA22AF4D0D}" type="datetimeFigureOut">
               <a:rPr lang="ru-RU" smtClean="0"/>
-              <a:t>02.04.2026</a:t>
+              <a:t>15.04.2026</a:t>
             </a:fld>
             <a:endParaRPr lang="ru-RU"/>
           </a:p>
@@ -485,13 +490,13 @@
   <p:clrMapOvr>
     <a:masterClrMapping/>
   </p:clrMapOvr>
-  <mc:AlternateContent xmlns:mc="http://schemas.openxmlformats.org/markup-compatibility/2006">
-    <mc:Choice xmlns:p14="http://schemas.microsoft.com/office/powerpoint/2010/main" Requires="p14">
+  <mc:AlternateContent xmlns:mc="http://schemas.openxmlformats.org/markup-compatibility/2006" xmlns:p14="http://schemas.microsoft.com/office/powerpoint/2010/main">
+    <mc:Choice Requires="p14">
       <p:transition spd="med" p14:dur="700">
         <p:fade/>
       </p:transition>
     </mc:Choice>
-    <mc:Fallback>
+    <mc:Fallback xmlns="">
       <p:transition spd="med">
         <p:fade/>
       </p:transition>
@@ -619,7 +624,7 @@
           <a:p>
             <a:fld id="{43FF4CB4-861E-4CB2-8936-28FA22AF4D0D}" type="datetimeFigureOut">
               <a:rPr lang="ru-RU" smtClean="0"/>
-              <a:t>02.04.2026</a:t>
+              <a:t>15.04.2026</a:t>
             </a:fld>
             <a:endParaRPr lang="ru-RU"/>
           </a:p>
@@ -677,13 +682,13 @@
   <p:clrMapOvr>
     <a:masterClrMapping/>
   </p:clrMapOvr>
-  <mc:AlternateContent xmlns:mc="http://schemas.openxmlformats.org/markup-compatibility/2006">
-    <mc:Choice xmlns:p14="http://schemas.microsoft.com/office/powerpoint/2010/main" Requires="p14">
+  <mc:AlternateContent xmlns:mc="http://schemas.openxmlformats.org/markup-compatibility/2006" xmlns:p14="http://schemas.microsoft.com/office/powerpoint/2010/main">
+    <mc:Choice Requires="p14">
       <p:transition spd="med" p14:dur="700">
         <p:fade/>
       </p:transition>
     </mc:Choice>
-    <mc:Fallback>
+    <mc:Fallback xmlns="">
       <p:transition spd="med">
         <p:fade/>
       </p:transition>
@@ -801,7 +806,7 @@
           <a:p>
             <a:fld id="{43FF4CB4-861E-4CB2-8936-28FA22AF4D0D}" type="datetimeFigureOut">
               <a:rPr lang="ru-RU" smtClean="0"/>
-              <a:t>02.04.2026</a:t>
+              <a:t>15.04.2026</a:t>
             </a:fld>
             <a:endParaRPr lang="ru-RU"/>
           </a:p>
@@ -859,13 +864,13 @@
   <p:clrMapOvr>
     <a:masterClrMapping/>
   </p:clrMapOvr>
-  <mc:AlternateContent xmlns:mc="http://schemas.openxmlformats.org/markup-compatibility/2006">
-    <mc:Choice xmlns:p14="http://schemas.microsoft.com/office/powerpoint/2010/main" Requires="p14">
+  <mc:AlternateContent xmlns:mc="http://schemas.openxmlformats.org/markup-compatibility/2006" xmlns:p14="http://schemas.microsoft.com/office/powerpoint/2010/main">
+    <mc:Choice Requires="p14">
       <p:transition spd="med" p14:dur="700">
         <p:fade/>
       </p:transition>
     </mc:Choice>
-    <mc:Fallback>
+    <mc:Fallback xmlns="">
       <p:transition spd="med">
         <p:fade/>
       </p:transition>
@@ -1059,7 +1064,7 @@
           <a:p>
             <a:fld id="{43FF4CB4-861E-4CB2-8936-28FA22AF4D0D}" type="datetimeFigureOut">
               <a:rPr lang="ru-RU" smtClean="0"/>
-              <a:t>02.04.2026</a:t>
+              <a:t>15.04.2026</a:t>
             </a:fld>
             <a:endParaRPr lang="ru-RU"/>
           </a:p>
@@ -1117,13 +1122,13 @@
   <p:clrMapOvr>
     <a:masterClrMapping/>
   </p:clrMapOvr>
-  <mc:AlternateContent xmlns:mc="http://schemas.openxmlformats.org/markup-compatibility/2006">
-    <mc:Choice xmlns:p14="http://schemas.microsoft.com/office/powerpoint/2010/main" Requires="p14">
+  <mc:AlternateContent xmlns:mc="http://schemas.openxmlformats.org/markup-compatibility/2006" xmlns:p14="http://schemas.microsoft.com/office/powerpoint/2010/main">
+    <mc:Choice Requires="p14">
       <p:transition spd="med" p14:dur="700">
         <p:fade/>
       </p:transition>
     </mc:Choice>
-    <mc:Fallback>
+    <mc:Fallback xmlns="">
       <p:transition spd="med">
         <p:fade/>
       </p:transition>
@@ -1303,7 +1308,7 @@
           <a:p>
             <a:fld id="{43FF4CB4-861E-4CB2-8936-28FA22AF4D0D}" type="datetimeFigureOut">
               <a:rPr lang="ru-RU" smtClean="0"/>
-              <a:t>02.04.2026</a:t>
+              <a:t>15.04.2026</a:t>
             </a:fld>
             <a:endParaRPr lang="ru-RU"/>
           </a:p>
@@ -1361,13 +1366,13 @@
   <p:clrMapOvr>
     <a:masterClrMapping/>
   </p:clrMapOvr>
-  <mc:AlternateContent xmlns:mc="http://schemas.openxmlformats.org/markup-compatibility/2006">
-    <mc:Choice xmlns:p14="http://schemas.microsoft.com/office/powerpoint/2010/main" Requires="p14">
+  <mc:AlternateContent xmlns:mc="http://schemas.openxmlformats.org/markup-compatibility/2006" xmlns:p14="http://schemas.microsoft.com/office/powerpoint/2010/main">
+    <mc:Choice Requires="p14">
       <p:transition spd="med" p14:dur="700">
         <p:fade/>
       </p:transition>
     </mc:Choice>
-    <mc:Fallback>
+    <mc:Fallback xmlns="">
       <p:transition spd="med">
         <p:fade/>
       </p:transition>
@@ -1682,7 +1687,7 @@
           <a:p>
             <a:fld id="{43FF4CB4-861E-4CB2-8936-28FA22AF4D0D}" type="datetimeFigureOut">
               <a:rPr lang="ru-RU" smtClean="0"/>
-              <a:t>02.04.2026</a:t>
+              <a:t>15.04.2026</a:t>
             </a:fld>
             <a:endParaRPr lang="ru-RU"/>
           </a:p>
@@ -1740,13 +1745,13 @@
   <p:clrMapOvr>
     <a:masterClrMapping/>
   </p:clrMapOvr>
-  <mc:AlternateContent xmlns:mc="http://schemas.openxmlformats.org/markup-compatibility/2006">
-    <mc:Choice xmlns:p14="http://schemas.microsoft.com/office/powerpoint/2010/main" Requires="p14">
+  <mc:AlternateContent xmlns:mc="http://schemas.openxmlformats.org/markup-compatibility/2006" xmlns:p14="http://schemas.microsoft.com/office/powerpoint/2010/main">
+    <mc:Choice Requires="p14">
       <p:transition spd="med" p14:dur="700">
         <p:fade/>
       </p:transition>
     </mc:Choice>
-    <mc:Fallback>
+    <mc:Fallback xmlns="">
       <p:transition spd="med">
         <p:fade/>
       </p:transition>
@@ -1812,7 +1817,7 @@
           <a:p>
             <a:fld id="{43FF4CB4-861E-4CB2-8936-28FA22AF4D0D}" type="datetimeFigureOut">
               <a:rPr lang="ru-RU" smtClean="0"/>
-              <a:t>02.04.2026</a:t>
+              <a:t>15.04.2026</a:t>
             </a:fld>
             <a:endParaRPr lang="ru-RU"/>
           </a:p>
@@ -1870,13 +1875,13 @@
   <p:clrMapOvr>
     <a:masterClrMapping/>
   </p:clrMapOvr>
-  <mc:AlternateContent xmlns:mc="http://schemas.openxmlformats.org/markup-compatibility/2006">
-    <mc:Choice xmlns:p14="http://schemas.microsoft.com/office/powerpoint/2010/main" Requires="p14">
+  <mc:AlternateContent xmlns:mc="http://schemas.openxmlformats.org/markup-compatibility/2006" xmlns:p14="http://schemas.microsoft.com/office/powerpoint/2010/main">
+    <mc:Choice Requires="p14">
       <p:transition spd="med" p14:dur="700">
         <p:fade/>
       </p:transition>
     </mc:Choice>
-    <mc:Fallback>
+    <mc:Fallback xmlns="">
       <p:transition spd="med">
         <p:fade/>
       </p:transition>
@@ -1919,7 +1924,7 @@
           <a:p>
             <a:fld id="{43FF4CB4-861E-4CB2-8936-28FA22AF4D0D}" type="datetimeFigureOut">
               <a:rPr lang="ru-RU" smtClean="0"/>
-              <a:t>02.04.2026</a:t>
+              <a:t>15.04.2026</a:t>
             </a:fld>
             <a:endParaRPr lang="ru-RU"/>
           </a:p>
@@ -1977,13 +1982,13 @@
   <p:clrMapOvr>
     <a:masterClrMapping/>
   </p:clrMapOvr>
-  <mc:AlternateContent xmlns:mc="http://schemas.openxmlformats.org/markup-compatibility/2006">
-    <mc:Choice xmlns:p14="http://schemas.microsoft.com/office/powerpoint/2010/main" Requires="p14">
+  <mc:AlternateContent xmlns:mc="http://schemas.openxmlformats.org/markup-compatibility/2006" xmlns:p14="http://schemas.microsoft.com/office/powerpoint/2010/main">
+    <mc:Choice Requires="p14">
       <p:transition spd="med" p14:dur="700">
         <p:fade/>
       </p:transition>
     </mc:Choice>
-    <mc:Fallback>
+    <mc:Fallback xmlns="">
       <p:transition spd="med">
         <p:fade/>
       </p:transition>
@@ -2208,7 +2213,7 @@
           <a:p>
             <a:fld id="{43FF4CB4-861E-4CB2-8936-28FA22AF4D0D}" type="datetimeFigureOut">
               <a:rPr lang="ru-RU" smtClean="0"/>
-              <a:t>02.04.2026</a:t>
+              <a:t>15.04.2026</a:t>
             </a:fld>
             <a:endParaRPr lang="ru-RU"/>
           </a:p>
@@ -2266,13 +2271,13 @@
   <p:clrMapOvr>
     <a:masterClrMapping/>
   </p:clrMapOvr>
-  <mc:AlternateContent xmlns:mc="http://schemas.openxmlformats.org/markup-compatibility/2006">
-    <mc:Choice xmlns:p14="http://schemas.microsoft.com/office/powerpoint/2010/main" Requires="p14">
+  <mc:AlternateContent xmlns:mc="http://schemas.openxmlformats.org/markup-compatibility/2006" xmlns:p14="http://schemas.microsoft.com/office/powerpoint/2010/main">
+    <mc:Choice Requires="p14">
       <p:transition spd="med" p14:dur="700">
         <p:fade/>
       </p:transition>
     </mc:Choice>
-    <mc:Fallback>
+    <mc:Fallback xmlns="">
       <p:transition spd="med">
         <p:fade/>
       </p:transition>
@@ -2473,7 +2478,7 @@
           <a:p>
             <a:fld id="{43FF4CB4-861E-4CB2-8936-28FA22AF4D0D}" type="datetimeFigureOut">
               <a:rPr lang="ru-RU" smtClean="0"/>
-              <a:t>02.04.2026</a:t>
+              <a:t>15.04.2026</a:t>
             </a:fld>
             <a:endParaRPr lang="ru-RU"/>
           </a:p>
@@ -2531,13 +2536,13 @@
   <p:clrMapOvr>
     <a:masterClrMapping/>
   </p:clrMapOvr>
-  <mc:AlternateContent xmlns:mc="http://schemas.openxmlformats.org/markup-compatibility/2006">
-    <mc:Choice xmlns:p14="http://schemas.microsoft.com/office/powerpoint/2010/main" Requires="p14">
+  <mc:AlternateContent xmlns:mc="http://schemas.openxmlformats.org/markup-compatibility/2006" xmlns:p14="http://schemas.microsoft.com/office/powerpoint/2010/main">
+    <mc:Choice Requires="p14">
       <p:transition spd="med" p14:dur="700">
         <p:fade/>
       </p:transition>
     </mc:Choice>
-    <mc:Fallback>
+    <mc:Fallback xmlns="">
       <p:transition spd="med">
         <p:fade/>
       </p:transition>
@@ -2723,7 +2728,7 @@
           <a:p>
             <a:fld id="{43FF4CB4-861E-4CB2-8936-28FA22AF4D0D}" type="datetimeFigureOut">
               <a:rPr lang="ru-RU" smtClean="0"/>
-              <a:t>02.04.2026</a:t>
+              <a:t>15.04.2026</a:t>
             </a:fld>
             <a:endParaRPr lang="ru-RU"/>
           </a:p>
@@ -2828,13 +2833,13 @@
     <p:sldLayoutId id="2147483658" r:id="rId10"/>
     <p:sldLayoutId id="2147483659" r:id="rId11"/>
   </p:sldLayoutIdLst>
-  <mc:AlternateContent xmlns:mc="http://schemas.openxmlformats.org/markup-compatibility/2006">
-    <mc:Choice xmlns:p14="http://schemas.microsoft.com/office/powerpoint/2010/main" Requires="p14">
+  <mc:AlternateContent xmlns:mc="http://schemas.openxmlformats.org/markup-compatibility/2006" xmlns:p14="http://schemas.microsoft.com/office/powerpoint/2010/main">
+    <mc:Choice Requires="p14">
       <p:transition spd="med" p14:dur="700">
         <p:fade/>
       </p:transition>
     </mc:Choice>
-    <mc:Fallback>
+    <mc:Fallback xmlns="">
       <p:transition spd="med">
         <p:fade/>
       </p:transition>
@@ -3152,13 +3157,13 @@
         </p:nvSpPr>
         <p:spPr>
           <a:xfrm>
-            <a:off x="1543050" y="731838"/>
-            <a:ext cx="9144000" cy="2387600"/>
+            <a:off x="1585912" y="2053286"/>
+            <a:ext cx="9058274" cy="842963"/>
           </a:xfrm>
         </p:spPr>
         <p:txBody>
           <a:bodyPr>
-            <a:normAutofit/>
+            <a:normAutofit fontScale="90000"/>
           </a:bodyPr>
           <a:lstStyle/>
           <a:p>
@@ -3257,6 +3262,51 @@
               <a:t>2026</a:t>
             </a:r>
             <a:endParaRPr lang="ru-RU" sz="2000" dirty="0"/>
+          </a:p>
+        </p:txBody>
+      </p:sp>
+      <p:sp>
+        <p:nvSpPr>
+          <p:cNvPr id="5" name="TextBox 4"/>
+          <p:cNvSpPr txBox="1"/>
+          <p:nvPr/>
+        </p:nvSpPr>
+        <p:spPr>
+          <a:xfrm>
+            <a:off x="2009394" y="397966"/>
+            <a:ext cx="8211309" cy="1200329"/>
+          </a:xfrm>
+          <a:prstGeom prst="rect">
+            <a:avLst/>
+          </a:prstGeom>
+          <a:noFill/>
+        </p:spPr>
+        <p:txBody>
+          <a:bodyPr wrap="square" rtlCol="0">
+            <a:spAutoFit/>
+          </a:bodyPr>
+          <a:lstStyle/>
+          <a:p>
+            <a:pPr algn="ctr"/>
+            <a:r>
+              <a:rPr lang="ru-RU" dirty="0" smtClean="0"/>
+              <a:t>ГОСУДАРСТВЕННОЕ БЮДЖЕТНОЕ ПРОФЕССИОНАЛЬНОЕ ОБРАЗОВАТЕЛЬНОЕ УЧРЕЖДЕНИЕ МОСКОВСКОЙ ОБЛАСТИ</a:t>
+            </a:r>
+          </a:p>
+          <a:p>
+            <a:pPr algn="ctr"/>
+            <a:r>
+              <a:rPr lang="ru-RU" dirty="0" smtClean="0"/>
+              <a:t> «ФИЗИКО-ТЕХНИЧЕСКИЙ КОЛЛЕДЖ»</a:t>
+            </a:r>
+          </a:p>
+          <a:p>
+            <a:pPr algn="ctr"/>
+            <a:r>
+              <a:rPr lang="ru-RU" dirty="0" smtClean="0"/>
+              <a:t> (ГБПОУ МО «ФИЗТЕХ-КОЛЛЕДЖ»)</a:t>
+            </a:r>
+            <a:endParaRPr lang="ru-RU" dirty="0"/>
           </a:p>
         </p:txBody>
       </p:sp>
@@ -3270,13 +3320,13 @@
   <p:clrMapOvr>
     <a:masterClrMapping/>
   </p:clrMapOvr>
-  <mc:AlternateContent xmlns:mc="http://schemas.openxmlformats.org/markup-compatibility/2006">
-    <mc:Choice xmlns:p14="http://schemas.microsoft.com/office/powerpoint/2010/main" Requires="p14">
+  <mc:AlternateContent xmlns:mc="http://schemas.openxmlformats.org/markup-compatibility/2006" xmlns:p14="http://schemas.microsoft.com/office/powerpoint/2010/main">
+    <mc:Choice Requires="p14">
       <p:transition spd="med" p14:dur="700">
         <p:fade/>
       </p:transition>
     </mc:Choice>
-    <mc:Fallback>
+    <mc:Fallback xmlns="">
       <p:transition spd="med">
         <p:fade/>
       </p:transition>
@@ -3321,7 +3371,7 @@
         </p:nvSpPr>
         <p:spPr>
           <a:xfrm>
-            <a:off x="710580" y="79512"/>
+            <a:off x="1680472" y="374787"/>
             <a:ext cx="4845395" cy="626165"/>
           </a:xfrm>
         </p:spPr>
@@ -3349,7 +3399,7 @@
         </p:nvSpPr>
         <p:spPr>
           <a:xfrm>
-            <a:off x="442222" y="1176269"/>
+            <a:off x="1680472" y="1538219"/>
             <a:ext cx="9964048" cy="3326158"/>
           </a:xfrm>
         </p:spPr>
@@ -3432,10 +3482,6 @@
             <a:r>
               <a:rPr lang="ru-RU" sz="2400" dirty="0" smtClean="0"/>
               <a:t>Программа сама даёт слова и подсказки, игрок угадывает один</a:t>
-            </a:r>
-            <a:r>
-              <a:rPr lang="ru-RU" sz="2400" dirty="0" smtClean="0"/>
-              <a:t/>
             </a:r>
             <a:br>
               <a:rPr lang="ru-RU" sz="2400" dirty="0" smtClean="0"/>
@@ -3454,13 +3500,13 @@
   <p:clrMapOvr>
     <a:masterClrMapping/>
   </p:clrMapOvr>
-  <mc:AlternateContent xmlns:mc="http://schemas.openxmlformats.org/markup-compatibility/2006">
-    <mc:Choice xmlns:p14="http://schemas.microsoft.com/office/powerpoint/2010/main" Requires="p14">
+  <mc:AlternateContent xmlns:mc="http://schemas.openxmlformats.org/markup-compatibility/2006" xmlns:p14="http://schemas.microsoft.com/office/powerpoint/2010/main">
+    <mc:Choice Requires="p14">
       <p:transition spd="med" p14:dur="700">
         <p:fade/>
       </p:transition>
     </mc:Choice>
-    <mc:Fallback>
+    <mc:Fallback xmlns="">
       <p:transition spd="med">
         <p:fade/>
       </p:transition>
@@ -3505,7 +3551,7 @@
         </p:nvSpPr>
         <p:spPr>
           <a:xfrm>
-            <a:off x="830263" y="111125"/>
+            <a:off x="468313" y="273050"/>
             <a:ext cx="3932237" cy="609600"/>
           </a:xfrm>
         </p:spPr>
@@ -3549,101 +3595,11 @@
         </p:blipFill>
         <p:spPr>
           <a:xfrm>
-            <a:off x="7629654" y="253999"/>
-            <a:ext cx="3114546" cy="6287269"/>
+            <a:off x="4057779" y="190499"/>
+            <a:ext cx="4028946" cy="6543676"/>
           </a:xfrm>
         </p:spPr>
       </p:pic>
-      <p:sp>
-        <p:nvSpPr>
-          <p:cNvPr id="6" name="TextBox 5"/>
-          <p:cNvSpPr txBox="1"/>
-          <p:nvPr/>
-        </p:nvSpPr>
-        <p:spPr>
-          <a:xfrm>
-            <a:off x="657225" y="1466850"/>
-            <a:ext cx="6705729" cy="4062651"/>
-          </a:xfrm>
-          <a:prstGeom prst="rect">
-            <a:avLst/>
-          </a:prstGeom>
-          <a:noFill/>
-        </p:spPr>
-        <p:txBody>
-          <a:bodyPr wrap="square" rtlCol="0">
-            <a:spAutoFit/>
-          </a:bodyPr>
-          <a:lstStyle/>
-          <a:p>
-            <a:r>
-              <a:rPr lang="ru-RU" sz="2400" b="1" dirty="0" smtClean="0"/>
-              <a:t>Роль:</a:t>
-            </a:r>
-            <a:r>
-              <a:rPr lang="ru-RU" sz="2400" dirty="0"/>
-              <a:t> Игрок</a:t>
-            </a:r>
-          </a:p>
-          <a:p>
-            <a:r>
-              <a:rPr lang="ru-RU" sz="2400" b="1" dirty="0"/>
-              <a:t>Основные </a:t>
-            </a:r>
-            <a:r>
-              <a:rPr lang="ru-RU" sz="2400" b="1" dirty="0" smtClean="0"/>
-              <a:t>сценарии:</a:t>
-            </a:r>
-            <a:endParaRPr lang="ru-RU" sz="2400" dirty="0" smtClean="0"/>
-          </a:p>
-          <a:p>
-            <a:r>
-              <a:rPr lang="ru-RU" sz="2400" dirty="0" smtClean="0"/>
-              <a:t>Игрок нажимает «Начать игру»</a:t>
-            </a:r>
-          </a:p>
-          <a:p>
-            <a:r>
-              <a:rPr lang="ru-RU" sz="2400" dirty="0" smtClean="0"/>
-              <a:t>Программа выводит подсказку</a:t>
-            </a:r>
-          </a:p>
-          <a:p>
-            <a:r>
-              <a:rPr lang="ru-RU" sz="2400" dirty="0" smtClean="0"/>
-              <a:t>Игрок вводит слово</a:t>
-            </a:r>
-          </a:p>
-          <a:p>
-            <a:r>
-              <a:rPr lang="ru-RU" sz="2400" dirty="0" smtClean="0"/>
-              <a:t>Если слово правильное, игрок выигрывает</a:t>
-            </a:r>
-          </a:p>
-          <a:p>
-            <a:r>
-              <a:rPr lang="ru-RU" sz="2400" dirty="0" smtClean="0"/>
-              <a:t>Если слово неправильное, программа продолжает выводить подсказки</a:t>
-            </a:r>
-          </a:p>
-          <a:p>
-            <a:r>
-              <a:rPr lang="ru-RU" sz="2400" dirty="0" smtClean="0"/>
-              <a:t>Когда закончатся 3 попытки, игрок проигрывает</a:t>
-            </a:r>
-          </a:p>
-          <a:p>
-            <a:r>
-              <a:rPr lang="ru-RU" sz="2400" dirty="0" smtClean="0"/>
-              <a:t>Появляется кнопка «Начать снова»</a:t>
-            </a:r>
-            <a:endParaRPr lang="ru-RU" sz="2400" dirty="0"/>
-          </a:p>
-          <a:p>
-            <a:endParaRPr lang="ru-RU" dirty="0"/>
-          </a:p>
-        </p:txBody>
-      </p:sp>
     </p:spTree>
     <p:extLst>
       <p:ext uri="{BB962C8B-B14F-4D97-AF65-F5344CB8AC3E}">
@@ -3654,13 +3610,13 @@
   <p:clrMapOvr>
     <a:masterClrMapping/>
   </p:clrMapOvr>
-  <mc:AlternateContent xmlns:mc="http://schemas.openxmlformats.org/markup-compatibility/2006">
-    <mc:Choice xmlns:p14="http://schemas.microsoft.com/office/powerpoint/2010/main" Requires="p14">
+  <mc:AlternateContent xmlns:mc="http://schemas.openxmlformats.org/markup-compatibility/2006" xmlns:p14="http://schemas.microsoft.com/office/powerpoint/2010/main">
+    <mc:Choice Requires="p14">
       <p:transition spd="med" p14:dur="700">
         <p:fade/>
       </p:transition>
     </mc:Choice>
-    <mc:Fallback>
+    <mc:Fallback xmlns="">
       <p:transition spd="med">
         <p:fade/>
       </p:transition>
@@ -3705,7 +3661,7 @@
         </p:nvSpPr>
         <p:spPr>
           <a:xfrm>
-            <a:off x="730250" y="171450"/>
+            <a:off x="558800" y="314325"/>
             <a:ext cx="4151312" cy="533400"/>
           </a:xfrm>
         </p:spPr>
@@ -3745,143 +3701,11 @@
         </p:blipFill>
         <p:spPr>
           <a:xfrm>
-            <a:off x="7212398" y="438150"/>
-            <a:ext cx="3531802" cy="6163940"/>
+            <a:off x="4469198" y="133350"/>
+            <a:ext cx="4274752" cy="6629400"/>
           </a:xfrm>
         </p:spPr>
       </p:pic>
-      <p:sp>
-        <p:nvSpPr>
-          <p:cNvPr id="6" name="TextBox 5"/>
-          <p:cNvSpPr txBox="1"/>
-          <p:nvPr/>
-        </p:nvSpPr>
-        <p:spPr>
-          <a:xfrm>
-            <a:off x="809625" y="1676400"/>
-            <a:ext cx="4738541" cy="2954655"/>
-          </a:xfrm>
-          <a:prstGeom prst="rect">
-            <a:avLst/>
-          </a:prstGeom>
-          <a:noFill/>
-        </p:spPr>
-        <p:txBody>
-          <a:bodyPr wrap="none" rtlCol="0">
-            <a:spAutoFit/>
-          </a:bodyPr>
-          <a:lstStyle/>
-          <a:p>
-            <a:r>
-              <a:rPr lang="ru-RU" sz="2400" dirty="0"/>
-              <a:t>Начало </a:t>
-            </a:r>
-            <a:r>
-              <a:rPr lang="ru-RU" sz="2400" dirty="0" smtClean="0"/>
-              <a:t>-</a:t>
-            </a:r>
-            <a:r>
-              <a:rPr lang="en-US" sz="2400" dirty="0" smtClean="0"/>
-              <a:t>&gt;</a:t>
-            </a:r>
-            <a:r>
-              <a:rPr lang="ru-RU" sz="2400" dirty="0" smtClean="0"/>
-              <a:t> </a:t>
-            </a:r>
-            <a:r>
-              <a:rPr lang="ru-RU" sz="2400" dirty="0"/>
-              <a:t>Выбор случайного слова</a:t>
-            </a:r>
-          </a:p>
-          <a:p>
-            <a:r>
-              <a:rPr lang="ru-RU" sz="2400" dirty="0"/>
-              <a:t>Пока есть </a:t>
-            </a:r>
-            <a:r>
-              <a:rPr lang="ru-RU" sz="2400" dirty="0" smtClean="0"/>
-              <a:t>попытки:</a:t>
-            </a:r>
-          </a:p>
-          <a:p>
-            <a:r>
-              <a:rPr lang="ru-RU" sz="2400" dirty="0" smtClean="0"/>
-              <a:t>Показать подсказку</a:t>
-            </a:r>
-          </a:p>
-          <a:p>
-            <a:r>
-              <a:rPr lang="ru-RU" sz="2400" dirty="0" smtClean="0"/>
-              <a:t>Ввод ответа</a:t>
-            </a:r>
-          </a:p>
-          <a:p>
-            <a:r>
-              <a:rPr lang="ru-RU" sz="2400" dirty="0" smtClean="0"/>
-              <a:t>Если </a:t>
-            </a:r>
-            <a:r>
-              <a:rPr lang="ru-RU" sz="2400" dirty="0"/>
-              <a:t>верно </a:t>
-            </a:r>
-            <a:r>
-              <a:rPr lang="ru-RU" sz="2400" dirty="0" smtClean="0"/>
-              <a:t>-</a:t>
-            </a:r>
-            <a:r>
-              <a:rPr lang="en-US" sz="2400" dirty="0" smtClean="0"/>
-              <a:t>&gt;</a:t>
-            </a:r>
-            <a:r>
-              <a:rPr lang="ru-RU" sz="2400" dirty="0" smtClean="0"/>
-              <a:t> Победа</a:t>
-            </a:r>
-          </a:p>
-          <a:p>
-            <a:r>
-              <a:rPr lang="ru-RU" sz="2400" dirty="0" smtClean="0"/>
-              <a:t>Если </a:t>
-            </a:r>
-            <a:r>
-              <a:rPr lang="ru-RU" sz="2400" dirty="0"/>
-              <a:t>неверно </a:t>
-            </a:r>
-            <a:r>
-              <a:rPr lang="en-US" sz="2400" dirty="0" smtClean="0"/>
-              <a:t>-&gt;</a:t>
-            </a:r>
-            <a:r>
-              <a:rPr lang="ru-RU" sz="2400" dirty="0" smtClean="0"/>
-              <a:t> </a:t>
-            </a:r>
-            <a:r>
-              <a:rPr lang="ru-RU" sz="2400" dirty="0"/>
-              <a:t>Попытка -1</a:t>
-            </a:r>
-          </a:p>
-          <a:p>
-            <a:r>
-              <a:rPr lang="ru-RU" sz="2400" dirty="0"/>
-              <a:t>Если попытки = 0 </a:t>
-            </a:r>
-            <a:r>
-              <a:rPr lang="en-US" sz="2400" dirty="0" smtClean="0"/>
-              <a:t>-&gt;</a:t>
-            </a:r>
-            <a:r>
-              <a:rPr lang="ru-RU" sz="2400" dirty="0" smtClean="0"/>
-              <a:t> </a:t>
-            </a:r>
-            <a:r>
-              <a:rPr lang="ru-RU" sz="2400" dirty="0"/>
-              <a:t>Поражение</a:t>
-            </a:r>
-          </a:p>
-          <a:p>
-            <a:endParaRPr lang="ru-RU" dirty="0"/>
-          </a:p>
-        </p:txBody>
-      </p:sp>
     </p:spTree>
     <p:extLst>
       <p:ext uri="{BB962C8B-B14F-4D97-AF65-F5344CB8AC3E}">
@@ -3892,13 +3716,13 @@
   <p:clrMapOvr>
     <a:masterClrMapping/>
   </p:clrMapOvr>
-  <mc:AlternateContent xmlns:mc="http://schemas.openxmlformats.org/markup-compatibility/2006">
-    <mc:Choice xmlns:p14="http://schemas.microsoft.com/office/powerpoint/2010/main" Requires="p14">
+  <mc:AlternateContent xmlns:mc="http://schemas.openxmlformats.org/markup-compatibility/2006" xmlns:p14="http://schemas.microsoft.com/office/powerpoint/2010/main">
+    <mc:Choice Requires="p14">
       <p:transition spd="med" p14:dur="700">
         <p:fade/>
       </p:transition>
     </mc:Choice>
-    <mc:Fallback>
+    <mc:Fallback xmlns="">
       <p:transition spd="med">
         <p:fade/>
       </p:transition>
@@ -3990,9 +3814,180 @@
           </a:xfrm>
         </p:spPr>
       </p:pic>
+      <p:sp>
+        <p:nvSpPr>
+          <p:cNvPr id="7" name="TextBox 6"/>
+          <p:cNvSpPr txBox="1"/>
+          <p:nvPr/>
+        </p:nvSpPr>
+        <p:spPr>
+          <a:xfrm>
+            <a:off x="1916123" y="4070745"/>
+            <a:ext cx="2039917" cy="461665"/>
+          </a:xfrm>
+          <a:prstGeom prst="rect">
+            <a:avLst/>
+          </a:prstGeom>
+          <a:noFill/>
+        </p:spPr>
+        <p:txBody>
+          <a:bodyPr wrap="none" rtlCol="0">
+            <a:spAutoFit/>
+          </a:bodyPr>
+          <a:lstStyle/>
+          <a:p>
+            <a:r>
+              <a:rPr lang="ru-RU" sz="2400" dirty="0" smtClean="0"/>
+              <a:t>Главное меню</a:t>
+            </a:r>
+            <a:endParaRPr lang="ru-RU" sz="2400" dirty="0"/>
+          </a:p>
+        </p:txBody>
+      </p:sp>
+      <p:sp>
+        <p:nvSpPr>
+          <p:cNvPr id="8" name="TextBox 7"/>
+          <p:cNvSpPr txBox="1"/>
+          <p:nvPr/>
+        </p:nvSpPr>
+        <p:spPr>
+          <a:xfrm>
+            <a:off x="8228466" y="4070744"/>
+            <a:ext cx="1678665" cy="461665"/>
+          </a:xfrm>
+          <a:prstGeom prst="rect">
+            <a:avLst/>
+          </a:prstGeom>
+          <a:noFill/>
+        </p:spPr>
+        <p:txBody>
+          <a:bodyPr wrap="none" rtlCol="0">
+            <a:spAutoFit/>
+          </a:bodyPr>
+          <a:lstStyle/>
+          <a:p>
+            <a:r>
+              <a:rPr lang="ru-RU" sz="2400" dirty="0" smtClean="0"/>
+              <a:t>Экран игры</a:t>
+            </a:r>
+            <a:endParaRPr lang="ru-RU" sz="2400" dirty="0"/>
+          </a:p>
+        </p:txBody>
+      </p:sp>
+      <p:sp>
+        <p:nvSpPr>
+          <p:cNvPr id="9" name="TextBox 8"/>
+          <p:cNvSpPr txBox="1"/>
+          <p:nvPr/>
+        </p:nvSpPr>
+        <p:spPr>
+          <a:xfrm>
+            <a:off x="1920409" y="4532409"/>
+            <a:ext cx="1851789" cy="1323439"/>
+          </a:xfrm>
+          <a:prstGeom prst="rect">
+            <a:avLst/>
+          </a:prstGeom>
+          <a:noFill/>
+        </p:spPr>
+        <p:txBody>
+          <a:bodyPr wrap="none" rtlCol="0">
+            <a:spAutoFit/>
+          </a:bodyPr>
+          <a:lstStyle/>
+          <a:p>
+            <a:pPr algn="ctr"/>
+            <a:r>
+              <a:rPr lang="ru-RU" sz="2000" dirty="0" smtClean="0"/>
+              <a:t>3 кнопки:</a:t>
+            </a:r>
+          </a:p>
+          <a:p>
+            <a:pPr algn="ctr"/>
+            <a:r>
+              <a:rPr lang="ru-RU" sz="2000" dirty="0" smtClean="0"/>
+              <a:t>Начать игру</a:t>
+            </a:r>
+          </a:p>
+          <a:p>
+            <a:pPr algn="ctr"/>
+            <a:r>
+              <a:rPr lang="ru-RU" sz="2000" dirty="0" smtClean="0"/>
+              <a:t>Описание игры</a:t>
+            </a:r>
+          </a:p>
+          <a:p>
+            <a:pPr algn="ctr"/>
+            <a:r>
+              <a:rPr lang="ru-RU" sz="2000" dirty="0" smtClean="0"/>
+              <a:t>Выйти из игры</a:t>
+            </a:r>
+            <a:endParaRPr lang="ru-RU" sz="2000" dirty="0"/>
+          </a:p>
+        </p:txBody>
+      </p:sp>
+      <p:sp>
+        <p:nvSpPr>
+          <p:cNvPr id="10" name="TextBox 9"/>
+          <p:cNvSpPr txBox="1"/>
+          <p:nvPr/>
+        </p:nvSpPr>
+        <p:spPr>
+          <a:xfrm>
+            <a:off x="7682450" y="4465734"/>
+            <a:ext cx="2770695" cy="1631216"/>
+          </a:xfrm>
+          <a:prstGeom prst="rect">
+            <a:avLst/>
+          </a:prstGeom>
+          <a:noFill/>
+        </p:spPr>
+        <p:txBody>
+          <a:bodyPr wrap="none" rtlCol="0">
+            <a:spAutoFit/>
+          </a:bodyPr>
+          <a:lstStyle/>
+          <a:p>
+            <a:pPr algn="ctr"/>
+            <a:r>
+              <a:rPr lang="ru-RU" sz="2000" dirty="0" smtClean="0"/>
+              <a:t>Счетчик попыток</a:t>
+            </a:r>
+          </a:p>
+          <a:p>
+            <a:pPr algn="ctr"/>
+            <a:r>
+              <a:rPr lang="ru-RU" sz="2000" dirty="0" smtClean="0"/>
+              <a:t>Поле вывода подсказок</a:t>
+            </a:r>
+          </a:p>
+          <a:p>
+            <a:pPr algn="ctr"/>
+            <a:r>
+              <a:rPr lang="ru-RU" sz="2000" dirty="0" smtClean="0"/>
+              <a:t>Поле ввода для слова</a:t>
+            </a:r>
+          </a:p>
+          <a:p>
+            <a:pPr algn="ctr"/>
+            <a:r>
+              <a:rPr lang="ru-RU" sz="2000" dirty="0" smtClean="0"/>
+              <a:t>Кнопка ОК</a:t>
+            </a:r>
+          </a:p>
+          <a:p>
+            <a:pPr algn="ctr"/>
+            <a:r>
+              <a:rPr lang="ru-RU" sz="2000" dirty="0" smtClean="0"/>
+              <a:t>Кнопка Выйти из игры</a:t>
+            </a:r>
+            <a:endParaRPr lang="ru-RU" sz="2000" dirty="0"/>
+          </a:p>
+        </p:txBody>
+      </p:sp>
       <p:pic>
         <p:nvPicPr>
-          <p:cNvPr id="6" name="Рисунок 5"/>
+          <p:cNvPr id="3" name="Рисунок 2"/>
           <p:cNvPicPr>
             <a:picLocks noChangeAspect="1"/>
           </p:cNvPicPr>
@@ -4012,185 +4007,14 @@
         </p:blipFill>
         <p:spPr>
           <a:xfrm>
-            <a:off x="6438899" y="1206101"/>
-            <a:ext cx="5257800" cy="2893220"/>
+            <a:off x="6419848" y="1206102"/>
+            <a:ext cx="5295900" cy="2893219"/>
           </a:xfrm>
           <a:prstGeom prst="rect">
             <a:avLst/>
           </a:prstGeom>
         </p:spPr>
       </p:pic>
-      <p:sp>
-        <p:nvSpPr>
-          <p:cNvPr id="7" name="TextBox 6"/>
-          <p:cNvSpPr txBox="1"/>
-          <p:nvPr/>
-        </p:nvSpPr>
-        <p:spPr>
-          <a:xfrm>
-            <a:off x="1916123" y="4070745"/>
-            <a:ext cx="2039917" cy="461665"/>
-          </a:xfrm>
-          <a:prstGeom prst="rect">
-            <a:avLst/>
-          </a:prstGeom>
-          <a:noFill/>
-        </p:spPr>
-        <p:txBody>
-          <a:bodyPr wrap="none" rtlCol="0">
-            <a:spAutoFit/>
-          </a:bodyPr>
-          <a:lstStyle/>
-          <a:p>
-            <a:r>
-              <a:rPr lang="ru-RU" sz="2400" dirty="0" smtClean="0"/>
-              <a:t>Главное меню</a:t>
-            </a:r>
-            <a:endParaRPr lang="ru-RU" sz="2400" dirty="0"/>
-          </a:p>
-        </p:txBody>
-      </p:sp>
-      <p:sp>
-        <p:nvSpPr>
-          <p:cNvPr id="8" name="TextBox 7"/>
-          <p:cNvSpPr txBox="1"/>
-          <p:nvPr/>
-        </p:nvSpPr>
-        <p:spPr>
-          <a:xfrm>
-            <a:off x="8228466" y="4070744"/>
-            <a:ext cx="1678665" cy="461665"/>
-          </a:xfrm>
-          <a:prstGeom prst="rect">
-            <a:avLst/>
-          </a:prstGeom>
-          <a:noFill/>
-        </p:spPr>
-        <p:txBody>
-          <a:bodyPr wrap="none" rtlCol="0">
-            <a:spAutoFit/>
-          </a:bodyPr>
-          <a:lstStyle/>
-          <a:p>
-            <a:r>
-              <a:rPr lang="ru-RU" sz="2400" dirty="0" smtClean="0"/>
-              <a:t>Экран игры</a:t>
-            </a:r>
-            <a:endParaRPr lang="ru-RU" sz="2400" dirty="0"/>
-          </a:p>
-        </p:txBody>
-      </p:sp>
-      <p:sp>
-        <p:nvSpPr>
-          <p:cNvPr id="9" name="TextBox 8"/>
-          <p:cNvSpPr txBox="1"/>
-          <p:nvPr/>
-        </p:nvSpPr>
-        <p:spPr>
-          <a:xfrm>
-            <a:off x="2010186" y="4532409"/>
-            <a:ext cx="1851789" cy="1323439"/>
-          </a:xfrm>
-          <a:prstGeom prst="rect">
-            <a:avLst/>
-          </a:prstGeom>
-          <a:noFill/>
-        </p:spPr>
-        <p:txBody>
-          <a:bodyPr wrap="none" rtlCol="0">
-            <a:spAutoFit/>
-          </a:bodyPr>
-          <a:lstStyle/>
-          <a:p>
-            <a:pPr algn="just"/>
-            <a:r>
-              <a:rPr lang="ru-RU" sz="2000" dirty="0" smtClean="0"/>
-              <a:t>3 кнопки:</a:t>
-            </a:r>
-          </a:p>
-          <a:p>
-            <a:pPr algn="just"/>
-            <a:r>
-              <a:rPr lang="ru-RU" sz="2000" dirty="0" smtClean="0"/>
-              <a:t>Начать игру</a:t>
-            </a:r>
-          </a:p>
-          <a:p>
-            <a:pPr algn="just"/>
-            <a:r>
-              <a:rPr lang="ru-RU" sz="2000" dirty="0" smtClean="0"/>
-              <a:t>Описание игры</a:t>
-            </a:r>
-          </a:p>
-          <a:p>
-            <a:pPr algn="just"/>
-            <a:r>
-              <a:rPr lang="ru-RU" sz="2000" dirty="0" smtClean="0"/>
-              <a:t>Выйти из игры</a:t>
-            </a:r>
-            <a:endParaRPr lang="ru-RU" sz="2000" dirty="0"/>
-          </a:p>
-        </p:txBody>
-      </p:sp>
-      <p:sp>
-        <p:nvSpPr>
-          <p:cNvPr id="10" name="TextBox 9"/>
-          <p:cNvSpPr txBox="1"/>
-          <p:nvPr/>
-        </p:nvSpPr>
-        <p:spPr>
-          <a:xfrm>
-            <a:off x="8228466" y="4532409"/>
-            <a:ext cx="2770695" cy="1631216"/>
-          </a:xfrm>
-          <a:prstGeom prst="rect">
-            <a:avLst/>
-          </a:prstGeom>
-          <a:noFill/>
-        </p:spPr>
-        <p:txBody>
-          <a:bodyPr wrap="none" rtlCol="0">
-            <a:spAutoFit/>
-          </a:bodyPr>
-          <a:lstStyle/>
-          <a:p>
-            <a:pPr algn="just"/>
-            <a:r>
-              <a:rPr lang="ru-RU" sz="2000" dirty="0" smtClean="0"/>
-              <a:t>Счетчик попыток</a:t>
-            </a:r>
-          </a:p>
-          <a:p>
-            <a:pPr algn="just"/>
-            <a:r>
-              <a:rPr lang="ru-RU" sz="2000" dirty="0" smtClean="0"/>
-              <a:t>Поле вывода подсказок</a:t>
-            </a:r>
-          </a:p>
-          <a:p>
-            <a:pPr algn="just"/>
-            <a:r>
-              <a:rPr lang="ru-RU" sz="2000" dirty="0" smtClean="0"/>
-              <a:t>Поле ввода для слова</a:t>
-            </a:r>
-          </a:p>
-          <a:p>
-            <a:pPr algn="just"/>
-            <a:r>
-              <a:rPr lang="ru-RU" sz="2000" dirty="0" smtClean="0"/>
-              <a:t>Кнопка ОК</a:t>
-            </a:r>
-          </a:p>
-          <a:p>
-            <a:pPr algn="just"/>
-            <a:r>
-              <a:rPr lang="ru-RU" sz="2000" dirty="0" smtClean="0"/>
-              <a:t>Кнопка Выйти из игры</a:t>
-            </a:r>
-            <a:endParaRPr lang="ru-RU" sz="2000" dirty="0"/>
-          </a:p>
-        </p:txBody>
-      </p:sp>
     </p:spTree>
     <p:extLst>
       <p:ext uri="{BB962C8B-B14F-4D97-AF65-F5344CB8AC3E}">
@@ -4201,13 +4025,13 @@
   <p:clrMapOvr>
     <a:masterClrMapping/>
   </p:clrMapOvr>
-  <mc:AlternateContent xmlns:mc="http://schemas.openxmlformats.org/markup-compatibility/2006">
-    <mc:Choice xmlns:p14="http://schemas.microsoft.com/office/powerpoint/2010/main" Requires="p14">
+  <mc:AlternateContent xmlns:mc="http://schemas.openxmlformats.org/markup-compatibility/2006" xmlns:p14="http://schemas.microsoft.com/office/powerpoint/2010/main">
+    <mc:Choice Requires="p14">
       <p:transition spd="med" p14:dur="700">
         <p:fade/>
       </p:transition>
     </mc:Choice>
-    <mc:Fallback>
+    <mc:Fallback xmlns="">
       <p:transition spd="med">
         <p:fade/>
       </p:transition>
@@ -4252,7 +4076,7 @@
         </p:nvSpPr>
         <p:spPr>
           <a:xfrm>
-            <a:off x="706438" y="47625"/>
+            <a:off x="763588" y="238125"/>
             <a:ext cx="3932237" cy="628650"/>
           </a:xfrm>
         </p:spPr>
@@ -4268,15 +4092,73 @@
           </a:p>
         </p:txBody>
       </p:sp>
+      <p:sp>
+        <p:nvSpPr>
+          <p:cNvPr id="8" name="TextBox 7"/>
+          <p:cNvSpPr txBox="1"/>
+          <p:nvPr/>
+        </p:nvSpPr>
+        <p:spPr>
+          <a:xfrm>
+            <a:off x="1088709" y="4886324"/>
+            <a:ext cx="3748719" cy="461665"/>
+          </a:xfrm>
+          <a:prstGeom prst="rect">
+            <a:avLst/>
+          </a:prstGeom>
+          <a:noFill/>
+        </p:spPr>
+        <p:txBody>
+          <a:bodyPr wrap="none" rtlCol="0">
+            <a:spAutoFit/>
+          </a:bodyPr>
+          <a:lstStyle/>
+          <a:p>
+            <a:r>
+              <a:rPr lang="ru-RU" sz="2400" dirty="0" smtClean="0"/>
+              <a:t>Пользователь угадал слово</a:t>
+            </a:r>
+            <a:endParaRPr lang="ru-RU" sz="2400" dirty="0"/>
+          </a:p>
+        </p:txBody>
+      </p:sp>
+      <p:sp>
+        <p:nvSpPr>
+          <p:cNvPr id="9" name="TextBox 8"/>
+          <p:cNvSpPr txBox="1"/>
+          <p:nvPr/>
+        </p:nvSpPr>
+        <p:spPr>
+          <a:xfrm>
+            <a:off x="6937565" y="4886324"/>
+            <a:ext cx="4136645" cy="461665"/>
+          </a:xfrm>
+          <a:prstGeom prst="rect">
+            <a:avLst/>
+          </a:prstGeom>
+          <a:noFill/>
+        </p:spPr>
+        <p:txBody>
+          <a:bodyPr wrap="none" rtlCol="0">
+            <a:spAutoFit/>
+          </a:bodyPr>
+          <a:lstStyle/>
+          <a:p>
+            <a:r>
+              <a:rPr lang="ru-RU" sz="2400" dirty="0" smtClean="0"/>
+              <a:t>Пользователь не угадал слово</a:t>
+            </a:r>
+            <a:endParaRPr lang="ru-RU" sz="2400" dirty="0"/>
+          </a:p>
+        </p:txBody>
+      </p:sp>
       <p:pic>
         <p:nvPicPr>
-          <p:cNvPr id="6" name="Объект 5"/>
+          <p:cNvPr id="4" name="Рисунок 3"/>
           <p:cNvPicPr>
-            <a:picLocks noGrp="1" noChangeAspect="1"/>
+            <a:picLocks noChangeAspect="1"/>
           </p:cNvPicPr>
-          <p:nvPr>
-            <p:ph idx="1"/>
-          </p:nvPr>
+          <p:nvPr/>
         </p:nvPicPr>
         <p:blipFill>
           <a:blip r:embed="rId2" cstate="print">
@@ -4292,14 +4174,17 @@
         </p:blipFill>
         <p:spPr>
           <a:xfrm>
-            <a:off x="449263" y="2012156"/>
-            <a:ext cx="5027612" cy="2874169"/>
-          </a:xfrm>
+            <a:off x="434709" y="1647825"/>
+            <a:ext cx="5051691" cy="2952750"/>
+          </a:xfrm>
+          <a:prstGeom prst="rect">
+            <a:avLst/>
+          </a:prstGeom>
         </p:spPr>
       </p:pic>
       <p:pic>
         <p:nvPicPr>
-          <p:cNvPr id="7" name="Рисунок 6"/>
+          <p:cNvPr id="5" name="Рисунок 4"/>
           <p:cNvPicPr>
             <a:picLocks noChangeAspect="1"/>
           </p:cNvPicPr>
@@ -4319,74 +4204,14 @@
         </p:blipFill>
         <p:spPr>
           <a:xfrm>
-            <a:off x="6496050" y="2012155"/>
-            <a:ext cx="5019676" cy="2874169"/>
+            <a:off x="6305550" y="1647825"/>
+            <a:ext cx="5048250" cy="2952750"/>
           </a:xfrm>
           <a:prstGeom prst="rect">
             <a:avLst/>
           </a:prstGeom>
         </p:spPr>
       </p:pic>
-      <p:sp>
-        <p:nvSpPr>
-          <p:cNvPr id="8" name="TextBox 7"/>
-          <p:cNvSpPr txBox="1"/>
-          <p:nvPr/>
-        </p:nvSpPr>
-        <p:spPr>
-          <a:xfrm>
-            <a:off x="1088709" y="4886324"/>
-            <a:ext cx="3748719" cy="461665"/>
-          </a:xfrm>
-          <a:prstGeom prst="rect">
-            <a:avLst/>
-          </a:prstGeom>
-          <a:noFill/>
-        </p:spPr>
-        <p:txBody>
-          <a:bodyPr wrap="none" rtlCol="0">
-            <a:spAutoFit/>
-          </a:bodyPr>
-          <a:lstStyle/>
-          <a:p>
-            <a:r>
-              <a:rPr lang="ru-RU" sz="2400" dirty="0" smtClean="0"/>
-              <a:t>Пользователь угадал слово</a:t>
-            </a:r>
-            <a:endParaRPr lang="ru-RU" sz="2400" dirty="0"/>
-          </a:p>
-        </p:txBody>
-      </p:sp>
-      <p:sp>
-        <p:nvSpPr>
-          <p:cNvPr id="9" name="TextBox 8"/>
-          <p:cNvSpPr txBox="1"/>
-          <p:nvPr/>
-        </p:nvSpPr>
-        <p:spPr>
-          <a:xfrm>
-            <a:off x="6937565" y="4886324"/>
-            <a:ext cx="4136645" cy="461665"/>
-          </a:xfrm>
-          <a:prstGeom prst="rect">
-            <a:avLst/>
-          </a:prstGeom>
-          <a:noFill/>
-        </p:spPr>
-        <p:txBody>
-          <a:bodyPr wrap="none" rtlCol="0">
-            <a:spAutoFit/>
-          </a:bodyPr>
-          <a:lstStyle/>
-          <a:p>
-            <a:r>
-              <a:rPr lang="ru-RU" sz="2400" dirty="0" smtClean="0"/>
-              <a:t>Пользователь не угадал слово</a:t>
-            </a:r>
-            <a:endParaRPr lang="ru-RU" sz="2400" dirty="0"/>
-          </a:p>
-        </p:txBody>
-      </p:sp>
     </p:spTree>
     <p:extLst>
       <p:ext uri="{BB962C8B-B14F-4D97-AF65-F5344CB8AC3E}">
@@ -4397,13 +4222,13 @@
   <p:clrMapOvr>
     <a:masterClrMapping/>
   </p:clrMapOvr>
-  <mc:AlternateContent xmlns:mc="http://schemas.openxmlformats.org/markup-compatibility/2006">
-    <mc:Choice xmlns:p14="http://schemas.microsoft.com/office/powerpoint/2010/main" Requires="p14">
+  <mc:AlternateContent xmlns:mc="http://schemas.openxmlformats.org/markup-compatibility/2006" xmlns:p14="http://schemas.microsoft.com/office/powerpoint/2010/main">
+    <mc:Choice Requires="p14">
       <p:transition spd="med" p14:dur="700">
         <p:fade/>
       </p:transition>
     </mc:Choice>
-    <mc:Fallback>
+    <mc:Fallback xmlns="">
       <p:transition spd="med">
         <p:fade/>
       </p:transition>
@@ -4448,7 +4273,7 @@
         </p:nvSpPr>
         <p:spPr>
           <a:xfrm>
-            <a:off x="650876" y="85724"/>
+            <a:off x="650876" y="209549"/>
             <a:ext cx="4532312" cy="638175"/>
           </a:xfrm>
         </p:spPr>
@@ -4488,8 +4313,8 @@
         </p:blipFill>
         <p:spPr>
           <a:xfrm>
-            <a:off x="2917032" y="1168400"/>
-            <a:ext cx="4839484" cy="4873625"/>
+            <a:off x="3602832" y="1139825"/>
+            <a:ext cx="5388768" cy="5337175"/>
           </a:xfrm>
         </p:spPr>
       </p:pic>
@@ -4503,13 +4328,13 @@
   <p:clrMapOvr>
     <a:masterClrMapping/>
   </p:clrMapOvr>
-  <mc:AlternateContent xmlns:mc="http://schemas.openxmlformats.org/markup-compatibility/2006">
-    <mc:Choice xmlns:p14="http://schemas.microsoft.com/office/powerpoint/2010/main" Requires="p14">
+  <mc:AlternateContent xmlns:mc="http://schemas.openxmlformats.org/markup-compatibility/2006" xmlns:p14="http://schemas.microsoft.com/office/powerpoint/2010/main">
+    <mc:Choice Requires="p14">
       <p:transition spd="med" p14:dur="700">
         <p:fade/>
       </p:transition>
     </mc:Choice>
-    <mc:Fallback>
+    <mc:Fallback xmlns="">
       <p:transition spd="med">
         <p:fade/>
       </p:transition>
@@ -4554,7 +4379,7 @@
         </p:nvSpPr>
         <p:spPr>
           <a:xfrm>
-            <a:off x="839787" y="152400"/>
+            <a:off x="1163637" y="419100"/>
             <a:ext cx="3932237" cy="552450"/>
           </a:xfrm>
         </p:spPr>
@@ -4578,8 +4403,8 @@
         </p:nvSpPr>
         <p:spPr>
           <a:xfrm>
-            <a:off x="839787" y="771525"/>
-            <a:ext cx="6800850" cy="6278642"/>
+            <a:off x="1163637" y="1390650"/>
+            <a:ext cx="9599613" cy="2954655"/>
           </a:xfrm>
           <a:prstGeom prst="rect">
             <a:avLst/>
@@ -4594,32 +4419,47 @@
           <a:p>
             <a:r>
               <a:rPr lang="ru-RU" sz="2400" b="1" dirty="0"/>
-              <a:t>Что сделано:</a:t>
-            </a:r>
-            <a:endParaRPr lang="ru-RU" sz="2400" dirty="0"/>
-          </a:p>
-          <a:p>
+              <a:t>Что сделано</a:t>
+            </a:r>
+            <a:r>
+              <a:rPr lang="ru-RU" sz="2400" b="1" dirty="0" smtClean="0"/>
+              <a:t>: </a:t>
+            </a:r>
+            <a:r>
+              <a:rPr lang="ru-RU" sz="2400" dirty="0" smtClean="0"/>
+              <a:t>создана </a:t>
+            </a:r>
             <a:r>
               <a:rPr lang="ru-RU" sz="2400" dirty="0"/>
-              <a:t>Создана база слов и подсказок</a:t>
-            </a:r>
-          </a:p>
-          <a:p>
+              <a:t>база слов и </a:t>
+            </a:r>
+            <a:r>
+              <a:rPr lang="ru-RU" sz="2400" dirty="0" smtClean="0"/>
+              <a:t>подсказок, </a:t>
+            </a:r>
             <a:r>
               <a:rPr lang="ru-RU" sz="2400" dirty="0"/>
-              <a:t>Реализован счётчик попыток (3 попытки)</a:t>
-            </a:r>
-          </a:p>
-          <a:p>
+              <a:t>р</a:t>
+            </a:r>
+            <a:r>
+              <a:rPr lang="ru-RU" sz="2400" dirty="0" smtClean="0"/>
+              <a:t>еализован </a:t>
+            </a:r>
             <a:r>
               <a:rPr lang="ru-RU" sz="2400" dirty="0"/>
-              <a:t>Разработан графический интерфейс</a:t>
-            </a:r>
-          </a:p>
-          <a:p>
+              <a:t>счётчик попыток (3 </a:t>
+            </a:r>
+            <a:r>
+              <a:rPr lang="ru-RU" sz="2400" dirty="0" smtClean="0"/>
+              <a:t>попытки), разработан </a:t>
+            </a:r>
             <a:r>
               <a:rPr lang="ru-RU" sz="2400" dirty="0"/>
-              <a:t>Добавлено </a:t>
+              <a:t>графический </a:t>
+            </a:r>
+            <a:r>
+              <a:rPr lang="ru-RU" sz="2400" dirty="0" smtClean="0"/>
+              <a:t>интерфейс, добавлено </a:t>
             </a:r>
             <a:r>
               <a:rPr lang="ru-RU" sz="2400" dirty="0" err="1"/>
@@ -4627,93 +4467,48 @@
             </a:r>
             <a:r>
               <a:rPr lang="ru-RU" sz="2400" dirty="0"/>
-              <a:t> действий</a:t>
-            </a:r>
-          </a:p>
-          <a:p>
+              <a:t> </a:t>
+            </a:r>
+            <a:r>
+              <a:rPr lang="ru-RU" sz="2400" dirty="0" smtClean="0"/>
+              <a:t>действий, реализовано </a:t>
+            </a:r>
             <a:r>
               <a:rPr lang="ru-RU" sz="2400" dirty="0"/>
-              <a:t>Реализовано фоновое музыкальное сопровождение</a:t>
-            </a:r>
-          </a:p>
-          <a:p>
+              <a:t>фоновое музыкальное сопровождение</a:t>
+            </a:r>
+          </a:p>
+          <a:p>
+            <a:endParaRPr lang="ru-RU" sz="2400" dirty="0"/>
+          </a:p>
+          <a:p>
+            <a:r>
+              <a:rPr lang="ru-RU" sz="2400" b="1" dirty="0" smtClean="0"/>
+              <a:t>Планы </a:t>
+            </a:r>
             <a:r>
               <a:rPr lang="ru-RU" sz="2400" b="1" dirty="0"/>
-              <a:t>Приобретённые навыки:</a:t>
-            </a:r>
-            <a:endParaRPr lang="ru-RU" sz="2400" dirty="0"/>
-          </a:p>
-          <a:p>
+              <a:t>на </a:t>
+            </a:r>
+            <a:r>
+              <a:rPr lang="ru-RU" sz="2400" b="1" dirty="0" smtClean="0"/>
+              <a:t>будущее:</a:t>
+            </a:r>
             <a:r>
               <a:rPr lang="ru-RU" sz="2400" dirty="0"/>
-              <a:t>Работа с </a:t>
-            </a:r>
-            <a:r>
-              <a:rPr lang="ru-RU" sz="2400" dirty="0" err="1"/>
-              <a:t>Tkinter</a:t>
+              <a:t> р</a:t>
+            </a:r>
+            <a:r>
+              <a:rPr lang="ru-RU" sz="2400" dirty="0" smtClean="0"/>
+              <a:t>асширить </a:t>
             </a:r>
             <a:r>
               <a:rPr lang="ru-RU" sz="2400" dirty="0"/>
-              <a:t> (графический интерфейс)</a:t>
-            </a:r>
-          </a:p>
-          <a:p>
-            <a:r>
-              <a:rPr lang="ru-RU" sz="2400" dirty="0"/>
-              <a:t>Работа с </a:t>
-            </a:r>
-            <a:r>
-              <a:rPr lang="ru-RU" sz="2400" dirty="0" err="1"/>
-              <a:t>Pygame</a:t>
-            </a:r>
-            <a:r>
-              <a:rPr lang="ru-RU" sz="2400" dirty="0"/>
-              <a:t> (воспроизведение музыки)</a:t>
-            </a:r>
-          </a:p>
-          <a:p>
-            <a:r>
-              <a:rPr lang="ru-RU" sz="2400" dirty="0"/>
-              <a:t>Работа с JSON-файлами</a:t>
-            </a:r>
-          </a:p>
-          <a:p>
-            <a:r>
-              <a:rPr lang="ru-RU" sz="2400" dirty="0" err="1"/>
-              <a:t>Логирование</a:t>
-            </a:r>
-            <a:r>
-              <a:rPr lang="ru-RU" sz="2400" dirty="0"/>
-              <a:t> событий</a:t>
-            </a:r>
-          </a:p>
-          <a:p>
-            <a:r>
-              <a:rPr lang="ru-RU" sz="2400" b="1" dirty="0"/>
-              <a:t>Планы на будущее:</a:t>
-            </a:r>
-            <a:endParaRPr lang="ru-RU" sz="2400" dirty="0"/>
-          </a:p>
-          <a:p>
-            <a:r>
-              <a:rPr lang="ru-RU" sz="2400" dirty="0"/>
-              <a:t>Расширить базу </a:t>
+              <a:t>базу </a:t>
             </a:r>
             <a:r>
               <a:rPr lang="ru-RU" sz="2400" dirty="0" smtClean="0"/>
-              <a:t>слов</a:t>
-            </a:r>
-          </a:p>
-          <a:p>
-            <a:r>
-              <a:rPr lang="ru-RU" sz="2400" dirty="0" smtClean="0"/>
-              <a:t>Добавить выбор уровня сложности</a:t>
-            </a:r>
-          </a:p>
-          <a:p>
-            <a:r>
-              <a:rPr lang="ru-RU" sz="2400" dirty="0" smtClean="0"/>
-              <a:t>Улучшить интерфейс</a:t>
+              <a:t>слов, добавить выбор уровня сложности, улучшить интерфейс</a:t>
             </a:r>
             <a:endParaRPr lang="ru-RU" sz="2400" dirty="0"/>
           </a:p>
@@ -4732,13 +4527,13 @@
   <p:clrMapOvr>
     <a:masterClrMapping/>
   </p:clrMapOvr>
-  <mc:AlternateContent xmlns:mc="http://schemas.openxmlformats.org/markup-compatibility/2006">
-    <mc:Choice xmlns:p14="http://schemas.microsoft.com/office/powerpoint/2010/main" Requires="p14">
+  <mc:AlternateContent xmlns:mc="http://schemas.openxmlformats.org/markup-compatibility/2006" xmlns:p14="http://schemas.microsoft.com/office/powerpoint/2010/main">
+    <mc:Choice Requires="p14">
       <p:transition spd="med" p14:dur="700">
         <p:fade/>
       </p:transition>
     </mc:Choice>
-    <mc:Fallback>
+    <mc:Fallback xmlns="">
       <p:transition spd="med">
         <p:fade/>
       </p:transition>
